--- a/frameworks/kernel-of-good-strategy/example-strategy-kernel.pptx
+++ b/frameworks/kernel-of-good-strategy/example-strategy-kernel.pptx
@@ -3217,11 +3217,11 @@
         <p:spPr>
           <a:xfrm>
             <a:off x="777240" y="950976"/>
-            <a:ext cx="10634472" cy="548640"/>
+            <a:ext cx="10634472" cy="644423"/>
           </a:xfrm>
           <a:prstGeom prst="roundRect">
             <a:avLst>
-              <a:gd name="adj" fmla="val 23333"/>
+              <a:gd name="adj" fmla="val 19865"/>
             </a:avLst>
           </a:prstGeom>
           <a:solidFill>
@@ -3291,7 +3291,7 @@
         <p:spPr>
           <a:xfrm>
             <a:off x="2697480" y="1024128"/>
-            <a:ext cx="8458200" cy="402336"/>
+            <a:ext cx="8458200" cy="498119"/>
           </a:xfrm>
           <a:prstGeom prst="rect">
             <a:avLst/>
@@ -3313,7 +3313,7 @@
               </a:spcAft>
             </a:pPr>
             <a:r>
-              <a:rPr sz="1500" b="0">
+              <a:rPr sz="1300" b="0">
                 <a:solidFill>
                   <a:srgbClr val="1E2847"/>
                 </a:solidFill>
@@ -3332,7 +3332,7 @@
         </p:nvSpPr>
         <p:spPr>
           <a:xfrm rot="10800000">
-            <a:off x="5961888" y="1572768"/>
+            <a:off x="5961888" y="1668551"/>
             <a:ext cx="274320" cy="146304"/>
           </a:xfrm>
           <a:prstGeom prst="triangle">
@@ -3362,12 +3362,12 @@
         </p:nvSpPr>
         <p:spPr>
           <a:xfrm>
-            <a:off x="777240" y="1792224"/>
-            <a:ext cx="10634472" cy="1024128"/>
+            <a:off x="777240" y="1888007"/>
+            <a:ext cx="10634472" cy="1221638"/>
           </a:xfrm>
           <a:prstGeom prst="roundRect">
             <a:avLst>
-              <a:gd name="adj" fmla="val 12500"/>
+              <a:gd name="adj" fmla="val 10479"/>
             </a:avLst>
           </a:prstGeom>
           <a:solidFill>
@@ -3394,7 +3394,7 @@
         </p:nvSpPr>
         <p:spPr>
           <a:xfrm>
-            <a:off x="1033271" y="1993392"/>
+            <a:off x="1033271" y="2120265"/>
             <a:ext cx="1828800" cy="164592"/>
           </a:xfrm>
           <a:prstGeom prst="rect">
@@ -3436,8 +3436,8 @@
         </p:nvSpPr>
         <p:spPr>
           <a:xfrm>
-            <a:off x="2697480" y="1865376"/>
-            <a:ext cx="8458200" cy="384048"/>
+            <a:off x="2697480" y="1961159"/>
+            <a:ext cx="8458200" cy="464515"/>
           </a:xfrm>
           <a:prstGeom prst="rect">
             <a:avLst/>
@@ -3459,7 +3459,7 @@
               </a:spcAft>
             </a:pPr>
             <a:r>
-              <a:rPr sz="1400" b="0">
+              <a:rPr sz="1200" b="0">
                 <a:solidFill>
                   <a:srgbClr val="1A1A1A"/>
                 </a:solidFill>
@@ -3478,7 +3478,7 @@
         </p:nvSpPr>
         <p:spPr>
           <a:xfrm>
-            <a:off x="1033271" y="2304288"/>
+            <a:off x="1033271" y="2498826"/>
             <a:ext cx="10122408" cy="10058"/>
           </a:xfrm>
           <a:prstGeom prst="rect">
@@ -3508,7 +3508,7 @@
         </p:nvSpPr>
         <p:spPr>
           <a:xfrm>
-            <a:off x="1033271" y="2505456"/>
+            <a:off x="1033271" y="2731084"/>
             <a:ext cx="2194560" cy="164592"/>
           </a:xfrm>
           <a:prstGeom prst="rect">
@@ -3550,8 +3550,8 @@
         </p:nvSpPr>
         <p:spPr>
           <a:xfrm>
-            <a:off x="2697480" y="2377440"/>
-            <a:ext cx="8458200" cy="384048"/>
+            <a:off x="2697480" y="2571978"/>
+            <a:ext cx="8458200" cy="464515"/>
           </a:xfrm>
           <a:prstGeom prst="rect">
             <a:avLst/>
@@ -3573,7 +3573,7 @@
               </a:spcAft>
             </a:pPr>
             <a:r>
-              <a:rPr sz="1400" b="0">
+              <a:rPr sz="1200" b="0">
                 <a:solidFill>
                   <a:srgbClr val="1E2847"/>
                 </a:solidFill>
@@ -3592,7 +3592,7 @@
         </p:nvSpPr>
         <p:spPr>
           <a:xfrm rot="10800000">
-            <a:off x="5961888" y="2889504"/>
+            <a:off x="5961888" y="3182797"/>
             <a:ext cx="274320" cy="146304"/>
           </a:xfrm>
           <a:prstGeom prst="triangle">
@@ -3622,12 +3622,12 @@
         </p:nvSpPr>
         <p:spPr>
           <a:xfrm>
-            <a:off x="777240" y="3108960"/>
-            <a:ext cx="3361944" cy="2980944"/>
+            <a:off x="777240" y="3402253"/>
+            <a:ext cx="3361944" cy="2687650"/>
           </a:xfrm>
           <a:prstGeom prst="roundRect">
             <a:avLst>
-              <a:gd name="adj" fmla="val 4294"/>
+              <a:gd name="adj" fmla="val 4763"/>
             </a:avLst>
           </a:prstGeom>
           <a:solidFill>
@@ -3654,7 +3654,7 @@
         </p:nvSpPr>
         <p:spPr>
           <a:xfrm>
-            <a:off x="996695" y="3346704"/>
+            <a:off x="996695" y="3639997"/>
             <a:ext cx="2923032" cy="292608"/>
           </a:xfrm>
           <a:prstGeom prst="rect">
@@ -3705,7 +3705,7 @@
         </p:nvSpPr>
         <p:spPr>
           <a:xfrm>
-            <a:off x="996695" y="3675887"/>
+            <a:off x="996695" y="3987469"/>
             <a:ext cx="2923032" cy="182880"/>
           </a:xfrm>
           <a:prstGeom prst="rect">
@@ -3734,48 +3734,6 @@
                 </a:solidFill>
                 <a:latin typeface="Helvetica Neue"/>
               </a:rPr>
-              <a:t>with existing fee-for-service business</a:t>
-            </a:r>
-          </a:p>
-        </p:txBody>
-      </p:sp>
-      <p:sp>
-        <p:nvSpPr>
-          <p:cNvPr id="19" name="TextBox 18"/>
-          <p:cNvSpPr txBox="1"/>
-          <p:nvPr/>
-        </p:nvSpPr>
-        <p:spPr>
-          <a:xfrm>
-            <a:off x="996695" y="3877056"/>
-            <a:ext cx="2923032" cy="182880"/>
-          </a:xfrm>
-          <a:prstGeom prst="rect">
-            <a:avLst/>
-          </a:prstGeom>
-          <a:noFill/>
-        </p:spPr>
-        <p:txBody>
-          <a:bodyPr wrap="square" lIns="0" rIns="0" tIns="0" bIns="0">
-            <a:spAutoFit/>
-          </a:bodyPr>
-          <a:lstStyle/>
-          <a:p>
-            <a:pPr algn="ctr">
-              <a:lnSpc>
-                <a:spcPct val="120000"/>
-              </a:lnSpc>
-              <a:spcAft>
-                <a:spcPts val="0"/>
-              </a:spcAft>
-            </a:pPr>
-            <a:r>
-              <a:rPr sz="1050" b="0">
-                <a:solidFill>
-                  <a:srgbClr val="555555"/>
-                </a:solidFill>
-                <a:latin typeface="Helvetica Neue"/>
-              </a:rPr>
               <a:t>Owner: Jeff</a:t>
             </a:r>
           </a:p>
@@ -3783,13 +3741,13 @@
       </p:sp>
       <p:sp>
         <p:nvSpPr>
-          <p:cNvPr id="20" name="Rectangle 19"/>
+          <p:cNvPr id="19" name="Rectangle 18"/>
           <p:cNvSpPr/>
           <p:nvPr/>
         </p:nvSpPr>
         <p:spPr>
           <a:xfrm>
-            <a:off x="996695" y="4151376"/>
+            <a:off x="996695" y="4261789"/>
             <a:ext cx="2923032" cy="10058"/>
           </a:xfrm>
           <a:prstGeom prst="rect">
@@ -3813,74 +3771,102 @@
       </p:sp>
       <p:sp>
         <p:nvSpPr>
+          <p:cNvPr id="20" name="TextBox 19"/>
+          <p:cNvSpPr txBox="1"/>
+          <p:nvPr/>
+        </p:nvSpPr>
+        <p:spPr>
+          <a:xfrm>
+            <a:off x="996695" y="4389805"/>
+            <a:ext cx="1371600" cy="164592"/>
+          </a:xfrm>
+          <a:prstGeom prst="rect">
+            <a:avLst/>
+          </a:prstGeom>
+          <a:noFill/>
+        </p:spPr>
+        <p:txBody>
+          <a:bodyPr wrap="square" lIns="0" rIns="0" tIns="0" bIns="0">
+            <a:spAutoFit/>
+          </a:bodyPr>
+          <a:lstStyle/>
+          <a:p>
+            <a:pPr algn="l">
+              <a:lnSpc>
+                <a:spcPct val="100000"/>
+              </a:lnSpc>
+              <a:spcAft>
+                <a:spcPts val="0"/>
+              </a:spcAft>
+            </a:pPr>
+            <a:r>
+              <a:rPr sz="950" b="0" spc="132">
+                <a:solidFill>
+                  <a:srgbClr val="555555"/>
+                </a:solidFill>
+                <a:latin typeface="Helvetica Neue"/>
+              </a:rPr>
+              <a:t>THIS YEAR</a:t>
+            </a:r>
+          </a:p>
+        </p:txBody>
+      </p:sp>
+      <p:sp>
+        <p:nvSpPr>
           <p:cNvPr id="21" name="TextBox 20"/>
           <p:cNvSpPr txBox="1"/>
           <p:nvPr/>
         </p:nvSpPr>
         <p:spPr>
           <a:xfrm>
-            <a:off x="996695" y="4279392"/>
-            <a:ext cx="1371600" cy="164592"/>
-          </a:xfrm>
-          <a:prstGeom prst="rect">
-            <a:avLst/>
-          </a:prstGeom>
-          <a:noFill/>
-        </p:spPr>
-        <p:txBody>
-          <a:bodyPr wrap="square" lIns="0" rIns="0" tIns="0" bIns="0">
-            <a:spAutoFit/>
-          </a:bodyPr>
-          <a:lstStyle/>
-          <a:p>
-            <a:pPr algn="l">
-              <a:lnSpc>
-                <a:spcPct val="100000"/>
-              </a:lnSpc>
-              <a:spcAft>
-                <a:spcPts val="0"/>
-              </a:spcAft>
-            </a:pPr>
-            <a:r>
-              <a:rPr sz="950" b="0" spc="132">
+            <a:off x="996695" y="4609261"/>
+            <a:ext cx="2923032" cy="887501"/>
+          </a:xfrm>
+          <a:prstGeom prst="rect">
+            <a:avLst/>
+          </a:prstGeom>
+          <a:noFill/>
+        </p:spPr>
+        <p:txBody>
+          <a:bodyPr wrap="square" lIns="0" rIns="0" tIns="0" bIns="0">
+            <a:spAutoFit/>
+          </a:bodyPr>
+          <a:lstStyle/>
+          <a:p>
+            <a:pPr algn="l">
+              <a:lnSpc>
+                <a:spcPct val="130000"/>
+              </a:lnSpc>
+              <a:spcAft>
+                <a:spcPts val="600"/>
+              </a:spcAft>
+            </a:pPr>
+            <a:r>
+              <a:rPr sz="1050" b="0">
+                <a:solidFill>
+                  <a:srgbClr val="2D2D2D"/>
+                </a:solidFill>
+                <a:latin typeface="Helvetica Neue"/>
+              </a:rPr>
+              <a:t>Engage 700 patients a month in Q4 in the Arizona region</a:t>
+            </a:r>
+            <a:r>
+              <a:rPr sz="900" b="0">
                 <a:solidFill>
                   <a:srgbClr val="555555"/>
                 </a:solidFill>
                 <a:latin typeface="Helvetica Neue"/>
               </a:rPr>
-              <a:t>THIS YEAR</a:t>
-            </a:r>
-          </a:p>
-        </p:txBody>
-      </p:sp>
-      <p:sp>
-        <p:nvSpPr>
-          <p:cNvPr id="22" name="TextBox 21"/>
-          <p:cNvSpPr txBox="1"/>
-          <p:nvPr/>
-        </p:nvSpPr>
-        <p:spPr>
-          <a:xfrm>
-            <a:off x="996695" y="4498848"/>
-            <a:ext cx="2923032" cy="1463040"/>
-          </a:xfrm>
-          <a:prstGeom prst="rect">
-            <a:avLst/>
-          </a:prstGeom>
-          <a:noFill/>
-        </p:spPr>
-        <p:txBody>
-          <a:bodyPr wrap="square" lIns="0" rIns="0" tIns="0" bIns="0">
-            <a:spAutoFit/>
-          </a:bodyPr>
-          <a:lstStyle/>
+              <a:t>   JEFF</a:t>
+            </a:r>
+          </a:p>
           <a:p>
             <a:pPr algn="l">
               <a:lnSpc>
                 <a:spcPct val="130000"/>
               </a:lnSpc>
               <a:spcAft>
-                <a:spcPts val="600"/>
+                <a:spcPts val="0"/>
               </a:spcAft>
             </a:pPr>
             <a:r>
@@ -3890,7 +3876,7 @@
                 </a:solidFill>
                 <a:latin typeface="Helvetica Neue"/>
               </a:rPr>
-              <a:t>Engage 700 patients a month in Q4 in the Arizona region</a:t>
+              <a:t>Perform, and collect payment on, 250 home tests in Q4</a:t>
             </a:r>
             <a:r>
               <a:rPr sz="900" b="0">
@@ -3899,34 +3885,6 @@
                 </a:solidFill>
                 <a:latin typeface="Helvetica Neue"/>
               </a:rPr>
-              <a:t>   JEFF</a:t>
-            </a:r>
-          </a:p>
-          <a:p>
-            <a:pPr algn="l">
-              <a:lnSpc>
-                <a:spcPct val="130000"/>
-              </a:lnSpc>
-              <a:spcAft>
-                <a:spcPts val="0"/>
-              </a:spcAft>
-            </a:pPr>
-            <a:r>
-              <a:rPr sz="1050" b="0">
-                <a:solidFill>
-                  <a:srgbClr val="2D2D2D"/>
-                </a:solidFill>
-                <a:latin typeface="Helvetica Neue"/>
-              </a:rPr>
-              <a:t>Perform, and collect payment on, 250 home tests in Q4</a:t>
-            </a:r>
-            <a:r>
-              <a:rPr sz="900" b="0">
-                <a:solidFill>
-                  <a:srgbClr val="555555"/>
-                </a:solidFill>
-                <a:latin typeface="Helvetica Neue"/>
-              </a:rPr>
               <a:t>   ROBERT</a:t>
             </a:r>
           </a:p>
@@ -3934,18 +3892,18 @@
       </p:sp>
       <p:sp>
         <p:nvSpPr>
-          <p:cNvPr id="23" name="Rounded Rectangle 22"/>
+          <p:cNvPr id="22" name="Rounded Rectangle 21"/>
           <p:cNvSpPr/>
           <p:nvPr/>
         </p:nvSpPr>
         <p:spPr>
           <a:xfrm>
-            <a:off x="4413504" y="3108960"/>
-            <a:ext cx="3361944" cy="2980944"/>
+            <a:off x="4413504" y="3402253"/>
+            <a:ext cx="3361944" cy="2687650"/>
           </a:xfrm>
           <a:prstGeom prst="roundRect">
             <a:avLst>
-              <a:gd name="adj" fmla="val 4294"/>
+              <a:gd name="adj" fmla="val 4763"/>
             </a:avLst>
           </a:prstGeom>
           <a:solidFill>
@@ -3966,14 +3924,65 @@
       </p:sp>
       <p:sp>
         <p:nvSpPr>
+          <p:cNvPr id="23" name="TextBox 22"/>
+          <p:cNvSpPr txBox="1"/>
+          <p:nvPr/>
+        </p:nvSpPr>
+        <p:spPr>
+          <a:xfrm>
+            <a:off x="4632960" y="3639997"/>
+            <a:ext cx="2923032" cy="292608"/>
+          </a:xfrm>
+          <a:prstGeom prst="rect">
+            <a:avLst/>
+          </a:prstGeom>
+          <a:noFill/>
+        </p:spPr>
+        <p:txBody>
+          <a:bodyPr wrap="square" lIns="0" rIns="0" tIns="0" bIns="0">
+            <a:spAutoFit/>
+          </a:bodyPr>
+          <a:lstStyle/>
+          <a:p>
+            <a:pPr algn="ctr">
+              <a:lnSpc>
+                <a:spcPct val="110000"/>
+              </a:lnSpc>
+              <a:spcAft>
+                <a:spcPts val="0"/>
+              </a:spcAft>
+            </a:pPr>
+            <a:r>
+              <a:rPr sz="1600" b="0">
+                <a:solidFill>
+                  <a:srgbClr val="C2410C"/>
+                </a:solidFill>
+                <a:latin typeface="New York"/>
+              </a:rPr>
+              <a:t>2</a:t>
+            </a:r>
+            <a:r>
+              <a:rPr sz="1600" b="0">
+                <a:solidFill>
+                  <a:srgbClr val="1A1A1A"/>
+                </a:solidFill>
+                <a:latin typeface="New York"/>
+              </a:rPr>
+              <a:t>   New delivery models</a:t>
+            </a:r>
+          </a:p>
+        </p:txBody>
+      </p:sp>
+      <p:sp>
+        <p:nvSpPr>
           <p:cNvPr id="24" name="TextBox 23"/>
           <p:cNvSpPr txBox="1"/>
           <p:nvPr/>
         </p:nvSpPr>
         <p:spPr>
           <a:xfrm>
-            <a:off x="4632960" y="3346704"/>
-            <a:ext cx="2923032" cy="292608"/>
+            <a:off x="4632960" y="3987469"/>
+            <a:ext cx="2923032" cy="182880"/>
           </a:xfrm>
           <a:prstGeom prst="rect">
             <a:avLst/>
@@ -3988,57 +3997,6 @@
           <a:p>
             <a:pPr algn="ctr">
               <a:lnSpc>
-                <a:spcPct val="110000"/>
-              </a:lnSpc>
-              <a:spcAft>
-                <a:spcPts val="0"/>
-              </a:spcAft>
-            </a:pPr>
-            <a:r>
-              <a:rPr sz="1600" b="0">
-                <a:solidFill>
-                  <a:srgbClr val="C2410C"/>
-                </a:solidFill>
-                <a:latin typeface="New York"/>
-              </a:rPr>
-              <a:t>2</a:t>
-            </a:r>
-            <a:r>
-              <a:rPr sz="1600" b="0">
-                <a:solidFill>
-                  <a:srgbClr val="1A1A1A"/>
-                </a:solidFill>
-                <a:latin typeface="New York"/>
-              </a:rPr>
-              <a:t>   New delivery models</a:t>
-            </a:r>
-          </a:p>
-        </p:txBody>
-      </p:sp>
-      <p:sp>
-        <p:nvSpPr>
-          <p:cNvPr id="25" name="TextBox 24"/>
-          <p:cNvSpPr txBox="1"/>
-          <p:nvPr/>
-        </p:nvSpPr>
-        <p:spPr>
-          <a:xfrm>
-            <a:off x="4632960" y="3675887"/>
-            <a:ext cx="2923032" cy="182880"/>
-          </a:xfrm>
-          <a:prstGeom prst="rect">
-            <a:avLst/>
-          </a:prstGeom>
-          <a:noFill/>
-        </p:spPr>
-        <p:txBody>
-          <a:bodyPr wrap="square" lIns="0" rIns="0" tIns="0" bIns="0">
-            <a:spAutoFit/>
-          </a:bodyPr>
-          <a:lstStyle/>
-          <a:p>
-            <a:pPr algn="ctr">
-              <a:lnSpc>
                 <a:spcPct val="120000"/>
               </a:lnSpc>
               <a:spcAft>
@@ -4052,48 +4010,6 @@
                 </a:solidFill>
                 <a:latin typeface="Helvetica Neue"/>
               </a:rPr>
-              <a:t>extend into new ways to deliver care</a:t>
-            </a:r>
-          </a:p>
-        </p:txBody>
-      </p:sp>
-      <p:sp>
-        <p:nvSpPr>
-          <p:cNvPr id="26" name="TextBox 25"/>
-          <p:cNvSpPr txBox="1"/>
-          <p:nvPr/>
-        </p:nvSpPr>
-        <p:spPr>
-          <a:xfrm>
-            <a:off x="4632960" y="3877056"/>
-            <a:ext cx="2923032" cy="182880"/>
-          </a:xfrm>
-          <a:prstGeom prst="rect">
-            <a:avLst/>
-          </a:prstGeom>
-          <a:noFill/>
-        </p:spPr>
-        <p:txBody>
-          <a:bodyPr wrap="square" lIns="0" rIns="0" tIns="0" bIns="0">
-            <a:spAutoFit/>
-          </a:bodyPr>
-          <a:lstStyle/>
-          <a:p>
-            <a:pPr algn="ctr">
-              <a:lnSpc>
-                <a:spcPct val="120000"/>
-              </a:lnSpc>
-              <a:spcAft>
-                <a:spcPts val="0"/>
-              </a:spcAft>
-            </a:pPr>
-            <a:r>
-              <a:rPr sz="1050" b="0">
-                <a:solidFill>
-                  <a:srgbClr val="555555"/>
-                </a:solidFill>
-                <a:latin typeface="Helvetica Neue"/>
-              </a:rPr>
               <a:t>Owner: Eric</a:t>
             </a:r>
           </a:p>
@@ -4101,13 +4017,13 @@
       </p:sp>
       <p:sp>
         <p:nvSpPr>
-          <p:cNvPr id="27" name="Rectangle 26"/>
+          <p:cNvPr id="25" name="Rectangle 24"/>
           <p:cNvSpPr/>
           <p:nvPr/>
         </p:nvSpPr>
         <p:spPr>
           <a:xfrm>
-            <a:off x="4632960" y="4151376"/>
+            <a:off x="4632960" y="4261789"/>
             <a:ext cx="2923032" cy="10058"/>
           </a:xfrm>
           <a:prstGeom prst="rect">
@@ -4131,13 +4047,13 @@
       </p:sp>
       <p:sp>
         <p:nvSpPr>
-          <p:cNvPr id="28" name="TextBox 27"/>
-          <p:cNvSpPr txBox="1"/>
-          <p:nvPr/>
-        </p:nvSpPr>
-        <p:spPr>
-          <a:xfrm>
-            <a:off x="4632960" y="4279392"/>
+          <p:cNvPr id="26" name="TextBox 25"/>
+          <p:cNvSpPr txBox="1"/>
+          <p:nvPr/>
+        </p:nvSpPr>
+        <p:spPr>
+          <a:xfrm>
+            <a:off x="4632960" y="4389805"/>
             <a:ext cx="1371600" cy="164592"/>
           </a:xfrm>
           <a:prstGeom prst="rect">
@@ -4173,14 +4089,14 @@
       </p:sp>
       <p:sp>
         <p:nvSpPr>
-          <p:cNvPr id="29" name="TextBox 28"/>
-          <p:cNvSpPr txBox="1"/>
-          <p:nvPr/>
-        </p:nvSpPr>
-        <p:spPr>
-          <a:xfrm>
-            <a:off x="4632960" y="4498848"/>
-            <a:ext cx="2923032" cy="1463040"/>
+          <p:cNvPr id="27" name="TextBox 26"/>
+          <p:cNvSpPr txBox="1"/>
+          <p:nvPr/>
+        </p:nvSpPr>
+        <p:spPr>
+          <a:xfrm>
+            <a:off x="4632960" y="4609261"/>
+            <a:ext cx="2923032" cy="1311402"/>
           </a:xfrm>
           <a:prstGeom prst="rect">
             <a:avLst/>
@@ -4202,7 +4118,7 @@
               </a:spcAft>
             </a:pPr>
             <a:r>
-              <a:rPr sz="1050" b="0">
+              <a:rPr sz="1000" b="0">
                 <a:solidFill>
                   <a:srgbClr val="2D2D2D"/>
                 </a:solidFill>
@@ -4211,7 +4127,7 @@
               <a:t>Treat 2,000 patients through occupational health</a:t>
             </a:r>
             <a:r>
-              <a:rPr sz="900" b="0">
+              <a:rPr sz="850" b="0">
                 <a:solidFill>
                   <a:srgbClr val="555555"/>
                 </a:solidFill>
@@ -4230,7 +4146,7 @@
               </a:spcAft>
             </a:pPr>
             <a:r>
-              <a:rPr sz="1050" b="0">
+              <a:rPr sz="1000" b="0">
                 <a:solidFill>
                   <a:srgbClr val="2D2D2D"/>
                 </a:solidFill>
@@ -4239,7 +4155,7 @@
               <a:t>$100,000 a month from ancillary DME products by end of Q3</a:t>
             </a:r>
             <a:r>
-              <a:rPr sz="900" b="0">
+              <a:rPr sz="850" b="0">
                 <a:solidFill>
                   <a:srgbClr val="555555"/>
                 </a:solidFill>
@@ -4258,7 +4174,7 @@
               </a:spcAft>
             </a:pPr>
             <a:r>
-              <a:rPr sz="1050" b="0">
+              <a:rPr sz="1000" b="0">
                 <a:solidFill>
                   <a:srgbClr val="2D2D2D"/>
                 </a:solidFill>
@@ -4267,7 +4183,7 @@
               <a:t>First dollar from the research division by end of Q3</a:t>
             </a:r>
             <a:r>
-              <a:rPr sz="900" b="0">
+              <a:rPr sz="850" b="0">
                 <a:solidFill>
                   <a:srgbClr val="555555"/>
                 </a:solidFill>
@@ -4280,18 +4196,18 @@
       </p:sp>
       <p:sp>
         <p:nvSpPr>
-          <p:cNvPr id="30" name="Rounded Rectangle 29"/>
+          <p:cNvPr id="28" name="Rounded Rectangle 27"/>
           <p:cNvSpPr/>
           <p:nvPr/>
         </p:nvSpPr>
         <p:spPr>
           <a:xfrm>
-            <a:off x="8049768" y="3108960"/>
-            <a:ext cx="3361944" cy="2980944"/>
+            <a:off x="8049768" y="3402253"/>
+            <a:ext cx="3361944" cy="2687650"/>
           </a:xfrm>
           <a:prstGeom prst="roundRect">
             <a:avLst>
-              <a:gd name="adj" fmla="val 4294"/>
+              <a:gd name="adj" fmla="val 4763"/>
             </a:avLst>
           </a:prstGeom>
           <a:solidFill>
@@ -4312,13 +4228,13 @@
       </p:sp>
       <p:sp>
         <p:nvSpPr>
-          <p:cNvPr id="31" name="TextBox 30"/>
-          <p:cNvSpPr txBox="1"/>
-          <p:nvPr/>
-        </p:nvSpPr>
-        <p:spPr>
-          <a:xfrm>
-            <a:off x="8269224" y="3346704"/>
+          <p:cNvPr id="29" name="TextBox 28"/>
+          <p:cNvSpPr txBox="1"/>
+          <p:nvPr/>
+        </p:nvSpPr>
+        <p:spPr>
+          <a:xfrm>
+            <a:off x="8269224" y="3639997"/>
             <a:ext cx="2923032" cy="292608"/>
           </a:xfrm>
           <a:prstGeom prst="rect">
@@ -4363,13 +4279,13 @@
       </p:sp>
       <p:sp>
         <p:nvSpPr>
-          <p:cNvPr id="32" name="TextBox 31"/>
-          <p:cNvSpPr txBox="1"/>
-          <p:nvPr/>
-        </p:nvSpPr>
-        <p:spPr>
-          <a:xfrm>
-            <a:off x="8269224" y="3675887"/>
+          <p:cNvPr id="30" name="TextBox 29"/>
+          <p:cNvSpPr txBox="1"/>
+          <p:nvPr/>
+        </p:nvSpPr>
+        <p:spPr>
+          <a:xfrm>
+            <a:off x="8269224" y="3987469"/>
             <a:ext cx="2923032" cy="182880"/>
           </a:xfrm>
           <a:prstGeom prst="rect">
@@ -4398,48 +4314,6 @@
                 </a:solidFill>
                 <a:latin typeface="Helvetica Neue"/>
               </a:rPr>
-              <a:t>extend into new regions</a:t>
-            </a:r>
-          </a:p>
-        </p:txBody>
-      </p:sp>
-      <p:sp>
-        <p:nvSpPr>
-          <p:cNvPr id="33" name="TextBox 32"/>
-          <p:cNvSpPr txBox="1"/>
-          <p:nvPr/>
-        </p:nvSpPr>
-        <p:spPr>
-          <a:xfrm>
-            <a:off x="8269224" y="3877056"/>
-            <a:ext cx="2923032" cy="182880"/>
-          </a:xfrm>
-          <a:prstGeom prst="rect">
-            <a:avLst/>
-          </a:prstGeom>
-          <a:noFill/>
-        </p:spPr>
-        <p:txBody>
-          <a:bodyPr wrap="square" lIns="0" rIns="0" tIns="0" bIns="0">
-            <a:spAutoFit/>
-          </a:bodyPr>
-          <a:lstStyle/>
-          <a:p>
-            <a:pPr algn="ctr">
-              <a:lnSpc>
-                <a:spcPct val="120000"/>
-              </a:lnSpc>
-              <a:spcAft>
-                <a:spcPts val="0"/>
-              </a:spcAft>
-            </a:pPr>
-            <a:r>
-              <a:rPr sz="1050" b="0">
-                <a:solidFill>
-                  <a:srgbClr val="555555"/>
-                </a:solidFill>
-                <a:latin typeface="Helvetica Neue"/>
-              </a:rPr>
               <a:t>Owner: Russell</a:t>
             </a:r>
           </a:p>
@@ -4447,13 +4321,13 @@
       </p:sp>
       <p:sp>
         <p:nvSpPr>
-          <p:cNvPr id="34" name="Rectangle 33"/>
+          <p:cNvPr id="31" name="Rectangle 30"/>
           <p:cNvSpPr/>
           <p:nvPr/>
         </p:nvSpPr>
         <p:spPr>
           <a:xfrm>
-            <a:off x="8269224" y="4151376"/>
+            <a:off x="8269224" y="4261789"/>
             <a:ext cx="2923032" cy="10058"/>
           </a:xfrm>
           <a:prstGeom prst="rect">
@@ -4477,13 +4351,13 @@
       </p:sp>
       <p:sp>
         <p:nvSpPr>
-          <p:cNvPr id="35" name="TextBox 34"/>
-          <p:cNvSpPr txBox="1"/>
-          <p:nvPr/>
-        </p:nvSpPr>
-        <p:spPr>
-          <a:xfrm>
-            <a:off x="8269224" y="4279392"/>
+          <p:cNvPr id="32" name="TextBox 31"/>
+          <p:cNvSpPr txBox="1"/>
+          <p:nvPr/>
+        </p:nvSpPr>
+        <p:spPr>
+          <a:xfrm>
+            <a:off x="8269224" y="4389805"/>
             <a:ext cx="1371600" cy="164592"/>
           </a:xfrm>
           <a:prstGeom prst="rect">
@@ -4519,14 +4393,14 @@
       </p:sp>
       <p:sp>
         <p:nvSpPr>
-          <p:cNvPr id="36" name="TextBox 35"/>
-          <p:cNvSpPr txBox="1"/>
-          <p:nvPr/>
-        </p:nvSpPr>
-        <p:spPr>
-          <a:xfrm>
-            <a:off x="8269224" y="4498848"/>
-            <a:ext cx="2923032" cy="1463040"/>
+          <p:cNvPr id="33" name="TextBox 32"/>
+          <p:cNvSpPr txBox="1"/>
+          <p:nvPr/>
+        </p:nvSpPr>
+        <p:spPr>
+          <a:xfrm>
+            <a:off x="8269224" y="4609261"/>
+            <a:ext cx="2923032" cy="1311402"/>
           </a:xfrm>
           <a:prstGeom prst="rect">
             <a:avLst/>
@@ -4548,7 +4422,7 @@
               </a:spcAft>
             </a:pPr>
             <a:r>
-              <a:rPr sz="1050" b="0">
+              <a:rPr sz="1000" b="0">
                 <a:solidFill>
                   <a:srgbClr val="2D2D2D"/>
                 </a:solidFill>
@@ -4557,7 +4431,7 @@
               <a:t>See the first patient in the Pacific Northwest by Aug 31</a:t>
             </a:r>
             <a:r>
-              <a:rPr sz="900" b="0">
+              <a:rPr sz="850" b="0">
                 <a:solidFill>
                   <a:srgbClr val="555555"/>
                 </a:solidFill>
@@ -4576,7 +4450,7 @@
               </a:spcAft>
             </a:pPr>
             <a:r>
-              <a:rPr sz="1050" b="0">
+              <a:rPr sz="1000" b="0">
                 <a:solidFill>
                   <a:srgbClr val="2D2D2D"/>
                 </a:solidFill>
@@ -4585,7 +4459,7 @@
               <a:t>Break ground on 4 new sites in Q4</a:t>
             </a:r>
             <a:r>
-              <a:rPr sz="900" b="0">
+              <a:rPr sz="850" b="0">
                 <a:solidFill>
                   <a:srgbClr val="555555"/>
                 </a:solidFill>
@@ -4604,7 +4478,7 @@
               </a:spcAft>
             </a:pPr>
             <a:r>
-              <a:rPr sz="1050" b="0">
+              <a:rPr sz="1000" b="0">
                 <a:solidFill>
                   <a:srgbClr val="2D2D2D"/>
                 </a:solidFill>
@@ -4613,7 +4487,7 @@
               <a:t>Sign 6 provider groups to co-build new facilities</a:t>
             </a:r>
             <a:r>
-              <a:rPr sz="900" b="0">
+              <a:rPr sz="850" b="0">
                 <a:solidFill>
                   <a:srgbClr val="555555"/>
                 </a:solidFill>
@@ -4626,7 +4500,7 @@
       </p:sp>
       <p:sp>
         <p:nvSpPr>
-          <p:cNvPr id="37" name="TextBox 36"/>
+          <p:cNvPr id="34" name="TextBox 33"/>
           <p:cNvSpPr txBox="1"/>
           <p:nvPr/>
         </p:nvSpPr>
@@ -4668,7 +4542,7 @@
       </p:sp>
       <p:sp>
         <p:nvSpPr>
-          <p:cNvPr id="38" name="TextBox 37"/>
+          <p:cNvPr id="35" name="TextBox 34"/>
           <p:cNvSpPr txBox="1"/>
           <p:nvPr/>
         </p:nvSpPr>
@@ -4921,29 +4795,29 @@
         <p:spPr>
           <a:xfrm>
             <a:off x="777240" y="1755648"/>
-            <a:ext cx="5074920" cy="822960"/>
-          </a:xfrm>
-          <a:prstGeom prst="rect">
-            <a:avLst/>
-          </a:prstGeom>
-          <a:noFill/>
-        </p:spPr>
-        <p:txBody>
-          <a:bodyPr wrap="square" lIns="0" rIns="0" tIns="0" bIns="0">
-            <a:spAutoFit/>
-          </a:bodyPr>
-          <a:lstStyle/>
-          <a:p>
-            <a:pPr algn="l">
-              <a:lnSpc>
-                <a:spcPct val="130000"/>
-              </a:lnSpc>
-              <a:spcAft>
-                <a:spcPts val="0"/>
-              </a:spcAft>
-            </a:pPr>
-            <a:r>
-              <a:rPr sz="1700" b="0">
+            <a:ext cx="5074920" cy="900277"/>
+          </a:xfrm>
+          <a:prstGeom prst="rect">
+            <a:avLst/>
+          </a:prstGeom>
+          <a:noFill/>
+        </p:spPr>
+        <p:txBody>
+          <a:bodyPr wrap="square" lIns="0" rIns="0" tIns="0" bIns="0">
+            <a:spAutoFit/>
+          </a:bodyPr>
+          <a:lstStyle/>
+          <a:p>
+            <a:pPr algn="l">
+              <a:lnSpc>
+                <a:spcPct val="135000"/>
+              </a:lnSpc>
+              <a:spcAft>
+                <a:spcPts val="0"/>
+              </a:spcAft>
+            </a:pPr>
+            <a:r>
+              <a:rPr sz="1496" b="0">
                 <a:solidFill>
                   <a:srgbClr val="1A1A1A"/>
                 </a:solidFill>
@@ -4962,7 +4836,7 @@
         </p:nvSpPr>
         <p:spPr>
           <a:xfrm>
-            <a:off x="777240" y="2743200"/>
+            <a:off x="777240" y="2857093"/>
             <a:ext cx="5074920" cy="164592"/>
           </a:xfrm>
           <a:prstGeom prst="rect">
@@ -5004,8 +4878,8 @@
         </p:nvSpPr>
         <p:spPr>
           <a:xfrm>
-            <a:off x="777240" y="2980944"/>
-            <a:ext cx="5074920" cy="1097280"/>
+            <a:off x="777240" y="3094837"/>
+            <a:ext cx="5074920" cy="1191543"/>
           </a:xfrm>
           <a:prstGeom prst="rect">
             <a:avLst/>
@@ -5027,7 +4901,7 @@
               </a:spcAft>
             </a:pPr>
             <a:r>
-              <a:rPr sz="1350" b="0">
+              <a:rPr sz="1188" b="0">
                 <a:solidFill>
                   <a:srgbClr val="2D2D2D"/>
                 </a:solidFill>
@@ -5046,12 +4920,12 @@
         </p:nvSpPr>
         <p:spPr>
           <a:xfrm>
-            <a:off x="777240" y="4480560"/>
-            <a:ext cx="5074920" cy="1325880"/>
+            <a:off x="777240" y="4643458"/>
+            <a:ext cx="5074920" cy="1391581"/>
           </a:xfrm>
           <a:prstGeom prst="roundRect">
             <a:avLst>
-              <a:gd name="adj" fmla="val 9655"/>
+              <a:gd name="adj" fmla="val 9199"/>
             </a:avLst>
           </a:prstGeom>
           <a:solidFill>
@@ -5078,7 +4952,7 @@
         </p:nvSpPr>
         <p:spPr>
           <a:xfrm>
-            <a:off x="1033271" y="4700016"/>
+            <a:off x="1033271" y="4862914"/>
             <a:ext cx="4562856" cy="164592"/>
           </a:xfrm>
           <a:prstGeom prst="rect">
@@ -5120,8 +4994,8 @@
         </p:nvSpPr>
         <p:spPr>
           <a:xfrm>
-            <a:off x="1033271" y="4937760"/>
-            <a:ext cx="4562856" cy="685800"/>
+            <a:off x="1033271" y="5100658"/>
+            <a:ext cx="4562856" cy="824653"/>
           </a:xfrm>
           <a:prstGeom prst="rect">
             <a:avLst/>
@@ -5143,7 +5017,7 @@
               </a:spcAft>
             </a:pPr>
             <a:r>
-              <a:rPr sz="1350" b="0">
+              <a:rPr sz="1188" b="0">
                 <a:solidFill>
                   <a:srgbClr val="2D2D2D"/>
                 </a:solidFill>
@@ -5163,7 +5037,7 @@
         <p:spPr>
           <a:xfrm>
             <a:off x="6089903" y="1517904"/>
-            <a:ext cx="10058" cy="4288536"/>
+            <a:ext cx="10058" cy="4517136"/>
           </a:xfrm>
           <a:prstGeom prst="rect">
             <a:avLst/>
@@ -5235,7 +5109,91 @@
         <p:spPr>
           <a:xfrm>
             <a:off x="6336792" y="1755648"/>
-            <a:ext cx="5074920" cy="822960"/>
+            <a:ext cx="5074920" cy="777512"/>
+          </a:xfrm>
+          <a:prstGeom prst="rect">
+            <a:avLst/>
+          </a:prstGeom>
+          <a:noFill/>
+        </p:spPr>
+        <p:txBody>
+          <a:bodyPr wrap="square" lIns="0" rIns="0" tIns="0" bIns="0">
+            <a:spAutoFit/>
+          </a:bodyPr>
+          <a:lstStyle/>
+          <a:p>
+            <a:pPr algn="l">
+              <a:lnSpc>
+                <a:spcPct val="135000"/>
+              </a:lnSpc>
+              <a:spcAft>
+                <a:spcPts val="0"/>
+              </a:spcAft>
+            </a:pPr>
+            <a:r>
+              <a:rPr sz="1292" b="0">
+                <a:solidFill>
+                  <a:srgbClr val="1E2847"/>
+                </a:solidFill>
+                <a:latin typeface="New York"/>
+              </a:rPr>
+              <a:t>Leverage our strength in delivering outcomes by shifting from fee for service to getting paid for results.</a:t>
+            </a:r>
+          </a:p>
+        </p:txBody>
+      </p:sp>
+      <p:sp>
+        <p:nvSpPr>
+          <p:cNvPr id="16" name="TextBox 15"/>
+          <p:cNvSpPr txBox="1"/>
+          <p:nvPr/>
+        </p:nvSpPr>
+        <p:spPr>
+          <a:xfrm>
+            <a:off x="6336792" y="2734328"/>
+            <a:ext cx="5074920" cy="164592"/>
+          </a:xfrm>
+          <a:prstGeom prst="rect">
+            <a:avLst/>
+          </a:prstGeom>
+          <a:noFill/>
+        </p:spPr>
+        <p:txBody>
+          <a:bodyPr wrap="square" lIns="0" rIns="0" tIns="0" bIns="0">
+            <a:spAutoFit/>
+          </a:bodyPr>
+          <a:lstStyle/>
+          <a:p>
+            <a:pPr algn="l">
+              <a:lnSpc>
+                <a:spcPct val="100000"/>
+              </a:lnSpc>
+              <a:spcAft>
+                <a:spcPts val="0"/>
+              </a:spcAft>
+            </a:pPr>
+            <a:r>
+              <a:rPr sz="1100" b="0" spc="132">
+                <a:solidFill>
+                  <a:srgbClr val="555555"/>
+                </a:solidFill>
+                <a:latin typeface="Helvetica Neue"/>
+              </a:rPr>
+              <a:t>WHY THIS POLICY FITS</a:t>
+            </a:r>
+          </a:p>
+        </p:txBody>
+      </p:sp>
+      <p:sp>
+        <p:nvSpPr>
+          <p:cNvPr id="17" name="TextBox 16"/>
+          <p:cNvSpPr txBox="1"/>
+          <p:nvPr/>
+        </p:nvSpPr>
+        <p:spPr>
+          <a:xfrm>
+            <a:off x="6336792" y="2972072"/>
+            <a:ext cx="5074920" cy="970557"/>
           </a:xfrm>
           <a:prstGeom prst="rect">
             <a:avLst/>
@@ -5253,84 +5211,19 @@
                 <a:spcPct val="130000"/>
               </a:lnSpc>
               <a:spcAft>
-                <a:spcPts val="0"/>
-              </a:spcAft>
-            </a:pPr>
-            <a:r>
-              <a:rPr sz="1700" b="0">
-                <a:solidFill>
-                  <a:srgbClr val="1E2847"/>
+                <a:spcPts val="700"/>
+              </a:spcAft>
+            </a:pPr>
+            <a:r>
+              <a:rPr sz="1026" b="0">
+                <a:solidFill>
+                  <a:srgbClr val="2D2D2D"/>
                 </a:solidFill>
                 <a:latin typeface="New York"/>
               </a:rPr>
-              <a:t>Leverage our strength in delivering outcomes by shifting from fee for service to getting paid for results.</a:t>
-            </a:r>
-          </a:p>
-        </p:txBody>
-      </p:sp>
-      <p:sp>
-        <p:nvSpPr>
-          <p:cNvPr id="16" name="TextBox 15"/>
-          <p:cNvSpPr txBox="1"/>
-          <p:nvPr/>
-        </p:nvSpPr>
-        <p:spPr>
-          <a:xfrm>
-            <a:off x="6336792" y="2743200"/>
-            <a:ext cx="5074920" cy="164592"/>
-          </a:xfrm>
-          <a:prstGeom prst="rect">
-            <a:avLst/>
-          </a:prstGeom>
-          <a:noFill/>
-        </p:spPr>
-        <p:txBody>
-          <a:bodyPr wrap="square" lIns="0" rIns="0" tIns="0" bIns="0">
-            <a:spAutoFit/>
-          </a:bodyPr>
-          <a:lstStyle/>
-          <a:p>
-            <a:pPr algn="l">
-              <a:lnSpc>
-                <a:spcPct val="100000"/>
-              </a:lnSpc>
-              <a:spcAft>
-                <a:spcPts val="0"/>
-              </a:spcAft>
-            </a:pPr>
-            <a:r>
-              <a:rPr sz="1100" b="0" spc="132">
-                <a:solidFill>
-                  <a:srgbClr val="555555"/>
-                </a:solidFill>
-                <a:latin typeface="Helvetica Neue"/>
-              </a:rPr>
-              <a:t>WHY THIS POLICY FITS</a:t>
-            </a:r>
-          </a:p>
-        </p:txBody>
-      </p:sp>
-      <p:sp>
-        <p:nvSpPr>
-          <p:cNvPr id="17" name="TextBox 16"/>
-          <p:cNvSpPr txBox="1"/>
-          <p:nvPr/>
-        </p:nvSpPr>
-        <p:spPr>
-          <a:xfrm>
-            <a:off x="6336792" y="2980944"/>
-            <a:ext cx="5074920" cy="1280160"/>
-          </a:xfrm>
-          <a:prstGeom prst="rect">
-            <a:avLst/>
-          </a:prstGeom>
-          <a:noFill/>
-        </p:spPr>
-        <p:txBody>
-          <a:bodyPr wrap="square" lIns="0" rIns="0" tIns="0" bIns="0">
-            <a:spAutoFit/>
-          </a:bodyPr>
-          <a:lstStyle/>
+              <a:t>Our outcomes data is the one asset a rate cut can't touch</a:t>
+            </a:r>
+          </a:p>
           <a:p>
             <a:pPr algn="l">
               <a:lnSpc>
@@ -5341,13 +5234,13 @@
               </a:spcAft>
             </a:pPr>
             <a:r>
-              <a:rPr sz="1350" b="0">
+              <a:rPr sz="1026" b="0">
                 <a:solidFill>
                   <a:srgbClr val="2D2D2D"/>
                 </a:solidFill>
                 <a:latin typeface="New York"/>
               </a:rPr>
-              <a:t>Our outcomes data is the one asset a rate cut can't touch</a:t>
+              <a:t>Payers cutting the test will still pay for a treated, adherent patient</a:t>
             </a:r>
           </a:p>
           <a:p>
@@ -5356,30 +5249,11 @@
                 <a:spcPct val="130000"/>
               </a:lnSpc>
               <a:spcAft>
-                <a:spcPts val="700"/>
-              </a:spcAft>
-            </a:pPr>
-            <a:r>
-              <a:rPr sz="1350" b="0">
-                <a:solidFill>
-                  <a:srgbClr val="2D2D2D"/>
-                </a:solidFill>
-                <a:latin typeface="New York"/>
-              </a:rPr>
-              <a:t>Payers cutting the test will still pay for a treated, adherent patient</a:t>
-            </a:r>
-          </a:p>
-          <a:p>
-            <a:pPr algn="l">
-              <a:lnSpc>
-                <a:spcPct val="130000"/>
-              </a:lnSpc>
-              <a:spcAft>
-                <a:spcPts val="0"/>
-              </a:spcAft>
-            </a:pPr>
-            <a:r>
-              <a:rPr sz="1350" b="0">
+                <a:spcPts val="0"/>
+              </a:spcAft>
+            </a:pPr>
+            <a:r>
+              <a:rPr sz="1026" b="0">
                 <a:solidFill>
                   <a:srgbClr val="2D2D2D"/>
                 </a:solidFill>
@@ -5398,12 +5272,12 @@
         </p:nvSpPr>
         <p:spPr>
           <a:xfrm>
-            <a:off x="6336792" y="4480560"/>
-            <a:ext cx="5074920" cy="1325880"/>
+            <a:off x="6336792" y="4740947"/>
+            <a:ext cx="5074920" cy="1294092"/>
           </a:xfrm>
           <a:prstGeom prst="roundRect">
             <a:avLst>
-              <a:gd name="adj" fmla="val 9655"/>
+              <a:gd name="adj" fmla="val 9892"/>
             </a:avLst>
           </a:prstGeom>
           <a:solidFill>
@@ -5430,7 +5304,7 @@
         </p:nvSpPr>
         <p:spPr>
           <a:xfrm>
-            <a:off x="6592824" y="4700016"/>
+            <a:off x="6592824" y="4960403"/>
             <a:ext cx="4562856" cy="164592"/>
           </a:xfrm>
           <a:prstGeom prst="rect">
@@ -5472,8 +5346,8 @@
         </p:nvSpPr>
         <p:spPr>
           <a:xfrm>
-            <a:off x="6592824" y="4937760"/>
-            <a:ext cx="4562856" cy="685800"/>
+            <a:off x="6592824" y="5198147"/>
+            <a:ext cx="4562856" cy="727164"/>
           </a:xfrm>
           <a:prstGeom prst="rect">
             <a:avLst/>
@@ -5495,7 +5369,7 @@
               </a:spcAft>
             </a:pPr>
             <a:r>
-              <a:rPr sz="1350" b="0">
+              <a:rPr sz="1026" b="0">
                 <a:solidFill>
                   <a:srgbClr val="2D2D2D"/>
                 </a:solidFill>
@@ -5726,7 +5600,7 @@
                 </a:solidFill>
                 <a:latin typeface="New York"/>
               </a:rPr>
-              <a:t>   Fuel the engine: with existing fee-for-service business</a:t>
+              <a:t>   Fuel the engine</a:t>
             </a:r>
           </a:p>
         </p:txBody>
@@ -5854,7 +5728,7 @@
         <p:spPr>
           <a:xfrm>
             <a:off x="777240" y="1975104"/>
-            <a:ext cx="5074920" cy="1188720"/>
+            <a:ext cx="5074920" cy="1131364"/>
           </a:xfrm>
           <a:prstGeom prst="rect">
             <a:avLst/>
@@ -5876,13 +5750,13 @@
               </a:spcAft>
             </a:pPr>
             <a:r>
-              <a:rPr sz="1500" b="0">
+              <a:rPr sz="1410" b="0">
                 <a:solidFill>
                   <a:srgbClr val="1A1A1A"/>
                 </a:solidFill>
                 <a:latin typeface="New York"/>
               </a:rPr>
-              <a:t>The in-lab and home-testing business we already run pays for the shift. Keep it full and keep it collecting while reimbursement still holds.</a:t>
+              <a:t>The existing fee-for-service business, in-lab and home testing, pays for the shift. Keep it full and keep it collecting while reimbursement still holds.</a:t>
             </a:r>
           </a:p>
         </p:txBody>
@@ -5895,7 +5769,7 @@
         </p:nvSpPr>
         <p:spPr>
           <a:xfrm>
-            <a:off x="777240" y="3108960"/>
+            <a:off x="777240" y="3307636"/>
             <a:ext cx="5074920" cy="164592"/>
           </a:xfrm>
           <a:prstGeom prst="rect">
@@ -5937,8 +5811,8 @@
         </p:nvSpPr>
         <p:spPr>
           <a:xfrm>
-            <a:off x="777240" y="3346704"/>
-            <a:ext cx="5074920" cy="1005840"/>
+            <a:off x="777240" y="3545380"/>
+            <a:ext cx="5074920" cy="1069415"/>
           </a:xfrm>
           <a:prstGeom prst="rect">
             <a:avLst/>
@@ -5960,7 +5834,7 @@
               </a:spcAft>
             </a:pPr>
             <a:r>
-              <a:rPr sz="1350" b="0">
+              <a:rPr sz="1269" b="0">
                 <a:solidFill>
                   <a:srgbClr val="2D2D2D"/>
                 </a:solidFill>
@@ -5979,7 +5853,7 @@
               </a:spcAft>
             </a:pPr>
             <a:r>
-              <a:rPr sz="1350" b="0">
+              <a:rPr sz="1269" b="0">
                 <a:solidFill>
                   <a:srgbClr val="2D2D2D"/>
                 </a:solidFill>
@@ -5998,12 +5872,12 @@
         </p:nvSpPr>
         <p:spPr>
           <a:xfrm>
-            <a:off x="777240" y="4480560"/>
-            <a:ext cx="5074920" cy="1188720"/>
+            <a:off x="777240" y="4849270"/>
+            <a:ext cx="5074920" cy="1185769"/>
           </a:xfrm>
           <a:prstGeom prst="roundRect">
             <a:avLst>
-              <a:gd name="adj" fmla="val 10769"/>
+              <a:gd name="adj" fmla="val 10796"/>
             </a:avLst>
           </a:prstGeom>
           <a:solidFill>
@@ -6030,7 +5904,7 @@
         </p:nvSpPr>
         <p:spPr>
           <a:xfrm>
-            <a:off x="1033271" y="4700016"/>
+            <a:off x="1033271" y="5068726"/>
             <a:ext cx="4562856" cy="164592"/>
           </a:xfrm>
           <a:prstGeom prst="rect">
@@ -6072,8 +5946,8 @@
         </p:nvSpPr>
         <p:spPr>
           <a:xfrm>
-            <a:off x="1033271" y="4937760"/>
-            <a:ext cx="4562856" cy="548640"/>
+            <a:off x="1033271" y="5306470"/>
+            <a:ext cx="4562856" cy="618841"/>
           </a:xfrm>
           <a:prstGeom prst="rect">
             <a:avLst/>
@@ -6095,7 +5969,7 @@
               </a:spcAft>
             </a:pPr>
             <a:r>
-              <a:rPr sz="1350" b="0">
+              <a:rPr sz="1269" b="0">
                 <a:solidFill>
                   <a:srgbClr val="2D2D2D"/>
                 </a:solidFill>
@@ -6115,7 +5989,7 @@
         <p:spPr>
           <a:xfrm>
             <a:off x="6089903" y="1737360"/>
-            <a:ext cx="10058" cy="4069080"/>
+            <a:ext cx="10058" cy="4297679"/>
           </a:xfrm>
           <a:prstGeom prst="rect">
             <a:avLst/>
@@ -6186,8 +6060,8 @@
         </p:nvSpPr>
         <p:spPr>
           <a:xfrm>
-            <a:off x="6336792" y="2011680"/>
-            <a:ext cx="5074920" cy="548640"/>
+            <a:off x="6336792" y="2011679"/>
+            <a:ext cx="5074920" cy="579500"/>
           </a:xfrm>
           <a:prstGeom prst="rect">
             <a:avLst/>
@@ -6237,7 +6111,7 @@
         </p:nvSpPr>
         <p:spPr>
           <a:xfrm>
-            <a:off x="6336792" y="2651760"/>
+            <a:off x="6336792" y="2700909"/>
             <a:ext cx="5074920" cy="10058"/>
           </a:xfrm>
           <a:prstGeom prst="rect">
@@ -6267,8 +6141,8 @@
         </p:nvSpPr>
         <p:spPr>
           <a:xfrm>
-            <a:off x="6336792" y="2798064"/>
-            <a:ext cx="5074920" cy="548640"/>
+            <a:off x="6336792" y="2865500"/>
+            <a:ext cx="5074920" cy="579500"/>
           </a:xfrm>
           <a:prstGeom prst="rect">
             <a:avLst/>
@@ -6318,7 +6192,7 @@
         </p:nvSpPr>
         <p:spPr>
           <a:xfrm>
-            <a:off x="6336792" y="3438144"/>
+            <a:off x="6336792" y="3554729"/>
             <a:ext cx="5074920" cy="10058"/>
           </a:xfrm>
           <a:prstGeom prst="rect">
@@ -6560,7 +6434,7 @@
                 </a:solidFill>
                 <a:latin typeface="New York"/>
               </a:rPr>
-              <a:t>   New delivery models: extend into new ways to deliver care</a:t>
+              <a:t>   New delivery models</a:t>
             </a:r>
           </a:p>
         </p:txBody>
@@ -6688,7 +6562,7 @@
         <p:spPr>
           <a:xfrm>
             <a:off x="777240" y="1975104"/>
-            <a:ext cx="5074920" cy="1188720"/>
+            <a:ext cx="5074920" cy="1323936"/>
           </a:xfrm>
           <a:prstGeom prst="rect">
             <a:avLst/>
@@ -6710,13 +6584,13 @@
               </a:spcAft>
             </a:pPr>
             <a:r>
-              <a:rPr sz="1500" b="0">
+              <a:rPr sz="1320" b="0">
                 <a:solidFill>
                   <a:srgbClr val="1A1A1A"/>
                 </a:solidFill>
                 <a:latin typeface="New York"/>
               </a:rPr>
-              <a:t>Find buyers who pay for a treated, sleeping patient rather than a test: employers through occupational health, patients through ancillary products, sponsors through research.</a:t>
+              <a:t>Extend into new ways to deliver care. Find buyers who pay for a treated, sleeping patient rather than a test: employers through occupational health, patients through ancillary products, sponsors through research.</a:t>
             </a:r>
           </a:p>
         </p:txBody>
@@ -6729,7 +6603,7 @@
         </p:nvSpPr>
         <p:spPr>
           <a:xfrm>
-            <a:off x="777240" y="3108960"/>
+            <a:off x="777240" y="3500208"/>
             <a:ext cx="5074920" cy="164592"/>
           </a:xfrm>
           <a:prstGeom prst="rect">
@@ -6771,8 +6645,8 @@
         </p:nvSpPr>
         <p:spPr>
           <a:xfrm>
-            <a:off x="777240" y="3346704"/>
-            <a:ext cx="5074920" cy="1005840"/>
+            <a:off x="777240" y="3737952"/>
+            <a:ext cx="5074920" cy="777347"/>
           </a:xfrm>
           <a:prstGeom prst="rect">
             <a:avLst/>
@@ -6794,7 +6668,7 @@
               </a:spcAft>
             </a:pPr>
             <a:r>
-              <a:rPr sz="1350" b="0">
+              <a:rPr sz="1188" b="0">
                 <a:solidFill>
                   <a:srgbClr val="2D2D2D"/>
                 </a:solidFill>
@@ -6813,7 +6687,7 @@
               </a:spcAft>
             </a:pPr>
             <a:r>
-              <a:rPr sz="1350" b="0">
+              <a:rPr sz="1188" b="0">
                 <a:solidFill>
                   <a:srgbClr val="2D2D2D"/>
                 </a:solidFill>
@@ -6832,12 +6706,12 @@
         </p:nvSpPr>
         <p:spPr>
           <a:xfrm>
-            <a:off x="777240" y="4480560"/>
-            <a:ext cx="5074920" cy="1188720"/>
+            <a:off x="777240" y="4881766"/>
+            <a:ext cx="5074920" cy="1153273"/>
           </a:xfrm>
           <a:prstGeom prst="roundRect">
             <a:avLst>
-              <a:gd name="adj" fmla="val 10769"/>
+              <a:gd name="adj" fmla="val 11100"/>
             </a:avLst>
           </a:prstGeom>
           <a:solidFill>
@@ -6864,7 +6738,7 @@
         </p:nvSpPr>
         <p:spPr>
           <a:xfrm>
-            <a:off x="1033271" y="4700016"/>
+            <a:off x="1033271" y="5101222"/>
             <a:ext cx="4562856" cy="164592"/>
           </a:xfrm>
           <a:prstGeom prst="rect">
@@ -6906,8 +6780,8 @@
         </p:nvSpPr>
         <p:spPr>
           <a:xfrm>
-            <a:off x="1033271" y="4937760"/>
-            <a:ext cx="4562856" cy="548640"/>
+            <a:off x="1033271" y="5338966"/>
+            <a:ext cx="4562856" cy="586345"/>
           </a:xfrm>
           <a:prstGeom prst="rect">
             <a:avLst/>
@@ -6929,7 +6803,7 @@
               </a:spcAft>
             </a:pPr>
             <a:r>
-              <a:rPr sz="1350" b="0">
+              <a:rPr sz="1188" b="0">
                 <a:solidFill>
                   <a:srgbClr val="2D2D2D"/>
                 </a:solidFill>
@@ -6949,7 +6823,7 @@
         <p:spPr>
           <a:xfrm>
             <a:off x="6089903" y="1737360"/>
-            <a:ext cx="10058" cy="4069080"/>
+            <a:ext cx="10058" cy="4297679"/>
           </a:xfrm>
           <a:prstGeom prst="rect">
             <a:avLst/>
@@ -7020,8 +6894,8 @@
         </p:nvSpPr>
         <p:spPr>
           <a:xfrm>
-            <a:off x="6336792" y="2011680"/>
-            <a:ext cx="5074920" cy="548640"/>
+            <a:off x="6336792" y="2011679"/>
+            <a:ext cx="5074920" cy="579500"/>
           </a:xfrm>
           <a:prstGeom prst="rect">
             <a:avLst/>
@@ -7071,7 +6945,7 @@
         </p:nvSpPr>
         <p:spPr>
           <a:xfrm>
-            <a:off x="6336792" y="2651760"/>
+            <a:off x="6336792" y="2700909"/>
             <a:ext cx="5074920" cy="10058"/>
           </a:xfrm>
           <a:prstGeom prst="rect">
@@ -7101,8 +6975,8 @@
         </p:nvSpPr>
         <p:spPr>
           <a:xfrm>
-            <a:off x="6336792" y="2798064"/>
-            <a:ext cx="5074920" cy="548640"/>
+            <a:off x="6336792" y="2865500"/>
+            <a:ext cx="5074920" cy="579500"/>
           </a:xfrm>
           <a:prstGeom prst="rect">
             <a:avLst/>
@@ -7152,7 +7026,7 @@
         </p:nvSpPr>
         <p:spPr>
           <a:xfrm>
-            <a:off x="6336792" y="3438144"/>
+            <a:off x="6336792" y="3554729"/>
             <a:ext cx="5074920" cy="10058"/>
           </a:xfrm>
           <a:prstGeom prst="rect">
@@ -7182,8 +7056,8 @@
         </p:nvSpPr>
         <p:spPr>
           <a:xfrm>
-            <a:off x="6336792" y="3584448"/>
-            <a:ext cx="5074920" cy="548640"/>
+            <a:off x="6336792" y="3719321"/>
+            <a:ext cx="5074920" cy="579500"/>
           </a:xfrm>
           <a:prstGeom prst="rect">
             <a:avLst/>
@@ -7233,7 +7107,7 @@
         </p:nvSpPr>
         <p:spPr>
           <a:xfrm>
-            <a:off x="6336792" y="4224528"/>
+            <a:off x="6336792" y="4408550"/>
             <a:ext cx="5074920" cy="10058"/>
           </a:xfrm>
           <a:prstGeom prst="rect">
@@ -7475,7 +7349,7 @@
                 </a:solidFill>
                 <a:latin typeface="New York"/>
               </a:rPr>
-              <a:t>   Geographic reach: extend into new regions</a:t>
+              <a:t>   Geographic reach</a:t>
             </a:r>
           </a:p>
         </p:txBody>
@@ -7603,7 +7477,7 @@
         <p:spPr>
           <a:xfrm>
             <a:off x="777240" y="1975104"/>
-            <a:ext cx="5074920" cy="1188720"/>
+            <a:ext cx="5074920" cy="1131364"/>
           </a:xfrm>
           <a:prstGeom prst="rect">
             <a:avLst/>
@@ -7625,13 +7499,13 @@
               </a:spcAft>
             </a:pPr>
             <a:r>
-              <a:rPr sz="1500" b="0">
+              <a:rPr sz="1410" b="0">
                 <a:solidFill>
                   <a:srgbClr val="1A1A1A"/>
                 </a:solidFill>
                 <a:latin typeface="New York"/>
               </a:rPr>
-              <a:t>Take the model to regions where sleep care is thin, built with provider groups who bring the patients, so new sites open with referrals already attached.</a:t>
+              <a:t>Extend into new regions where sleep care is thin. Build each site with provider groups who bring the patients, so it opens with referrals already attached.</a:t>
             </a:r>
           </a:p>
         </p:txBody>
@@ -7644,7 +7518,7 @@
         </p:nvSpPr>
         <p:spPr>
           <a:xfrm>
-            <a:off x="777240" y="3108960"/>
+            <a:off x="777240" y="3307636"/>
             <a:ext cx="5074920" cy="164592"/>
           </a:xfrm>
           <a:prstGeom prst="rect">
@@ -7686,8 +7560,8 @@
         </p:nvSpPr>
         <p:spPr>
           <a:xfrm>
-            <a:off x="777240" y="3346704"/>
-            <a:ext cx="5074920" cy="1005840"/>
+            <a:off x="777240" y="3545380"/>
+            <a:ext cx="5074920" cy="824286"/>
           </a:xfrm>
           <a:prstGeom prst="rect">
             <a:avLst/>
@@ -7709,7 +7583,7 @@
               </a:spcAft>
             </a:pPr>
             <a:r>
-              <a:rPr sz="1350" b="0">
+              <a:rPr sz="1269" b="0">
                 <a:solidFill>
                   <a:srgbClr val="2D2D2D"/>
                 </a:solidFill>
@@ -7728,7 +7602,7 @@
               </a:spcAft>
             </a:pPr>
             <a:r>
-              <a:rPr sz="1350" b="0">
+              <a:rPr sz="1269" b="0">
                 <a:solidFill>
                   <a:srgbClr val="2D2D2D"/>
                 </a:solidFill>
@@ -7747,12 +7621,12 @@
         </p:nvSpPr>
         <p:spPr>
           <a:xfrm>
-            <a:off x="777240" y="4480560"/>
-            <a:ext cx="5074920" cy="1188720"/>
+            <a:off x="777240" y="4849270"/>
+            <a:ext cx="5074920" cy="1185769"/>
           </a:xfrm>
           <a:prstGeom prst="roundRect">
             <a:avLst>
-              <a:gd name="adj" fmla="val 10769"/>
+              <a:gd name="adj" fmla="val 10796"/>
             </a:avLst>
           </a:prstGeom>
           <a:solidFill>
@@ -7779,7 +7653,7 @@
         </p:nvSpPr>
         <p:spPr>
           <a:xfrm>
-            <a:off x="1033271" y="4700016"/>
+            <a:off x="1033271" y="5068726"/>
             <a:ext cx="4562856" cy="164592"/>
           </a:xfrm>
           <a:prstGeom prst="rect">
@@ -7821,8 +7695,8 @@
         </p:nvSpPr>
         <p:spPr>
           <a:xfrm>
-            <a:off x="1033271" y="4937760"/>
-            <a:ext cx="4562856" cy="548640"/>
+            <a:off x="1033271" y="5306470"/>
+            <a:ext cx="4562856" cy="618841"/>
           </a:xfrm>
           <a:prstGeom prst="rect">
             <a:avLst/>
@@ -7844,7 +7718,7 @@
               </a:spcAft>
             </a:pPr>
             <a:r>
-              <a:rPr sz="1350" b="0">
+              <a:rPr sz="1269" b="0">
                 <a:solidFill>
                   <a:srgbClr val="2D2D2D"/>
                 </a:solidFill>
@@ -7864,7 +7738,7 @@
         <p:spPr>
           <a:xfrm>
             <a:off x="6089903" y="1737360"/>
-            <a:ext cx="10058" cy="4069080"/>
+            <a:ext cx="10058" cy="4297679"/>
           </a:xfrm>
           <a:prstGeom prst="rect">
             <a:avLst/>
@@ -7935,8 +7809,8 @@
         </p:nvSpPr>
         <p:spPr>
           <a:xfrm>
-            <a:off x="6336792" y="2011680"/>
-            <a:ext cx="5074920" cy="548640"/>
+            <a:off x="6336792" y="2011679"/>
+            <a:ext cx="5074920" cy="579500"/>
           </a:xfrm>
           <a:prstGeom prst="rect">
             <a:avLst/>
@@ -7986,7 +7860,7 @@
         </p:nvSpPr>
         <p:spPr>
           <a:xfrm>
-            <a:off x="6336792" y="2651760"/>
+            <a:off x="6336792" y="2700909"/>
             <a:ext cx="5074920" cy="10058"/>
           </a:xfrm>
           <a:prstGeom prst="rect">
@@ -8016,8 +7890,8 @@
         </p:nvSpPr>
         <p:spPr>
           <a:xfrm>
-            <a:off x="6336792" y="2798064"/>
-            <a:ext cx="5074920" cy="548640"/>
+            <a:off x="6336792" y="2865500"/>
+            <a:ext cx="5074920" cy="289750"/>
           </a:xfrm>
           <a:prstGeom prst="rect">
             <a:avLst/>
@@ -8067,7 +7941,7 @@
         </p:nvSpPr>
         <p:spPr>
           <a:xfrm>
-            <a:off x="6336792" y="3438144"/>
+            <a:off x="6336792" y="3264979"/>
             <a:ext cx="5074920" cy="10058"/>
           </a:xfrm>
           <a:prstGeom prst="rect">
@@ -8097,8 +7971,8 @@
         </p:nvSpPr>
         <p:spPr>
           <a:xfrm>
-            <a:off x="6336792" y="3584448"/>
-            <a:ext cx="5074920" cy="548640"/>
+            <a:off x="6336792" y="3429571"/>
+            <a:ext cx="5074920" cy="579500"/>
           </a:xfrm>
           <a:prstGeom prst="rect">
             <a:avLst/>
@@ -8148,7 +8022,7 @@
         </p:nvSpPr>
         <p:spPr>
           <a:xfrm>
-            <a:off x="6336792" y="4224528"/>
+            <a:off x="6336792" y="4118800"/>
             <a:ext cx="5074920" cy="10058"/>
           </a:xfrm>
           <a:prstGeom prst="rect">
@@ -8551,7 +8425,7 @@
         <p:spPr>
           <a:xfrm>
             <a:off x="777240" y="2542032"/>
-            <a:ext cx="4572000" cy="457200"/>
+            <a:ext cx="4572000" cy="659853"/>
           </a:xfrm>
           <a:prstGeom prst="rect">
             <a:avLst/>
@@ -8602,7 +8476,7 @@
         <p:spPr>
           <a:xfrm>
             <a:off x="5852160" y="2560320"/>
-            <a:ext cx="5559552" cy="457200"/>
+            <a:ext cx="5559552" cy="659853"/>
           </a:xfrm>
           <a:prstGeom prst="rect">
             <a:avLst/>
@@ -8643,7 +8517,7 @@
         </p:nvSpPr>
         <p:spPr>
           <a:xfrm>
-            <a:off x="777240" y="3145535"/>
+            <a:off x="777240" y="3329901"/>
             <a:ext cx="10634472" cy="10058"/>
           </a:xfrm>
           <a:prstGeom prst="rect">
@@ -8673,8 +8547,8 @@
         </p:nvSpPr>
         <p:spPr>
           <a:xfrm>
-            <a:off x="777240" y="3364991"/>
-            <a:ext cx="4572000" cy="457200"/>
+            <a:off x="777240" y="3476205"/>
+            <a:ext cx="4572000" cy="659853"/>
           </a:xfrm>
           <a:prstGeom prst="rect">
             <a:avLst/>
@@ -8724,8 +8598,8 @@
         </p:nvSpPr>
         <p:spPr>
           <a:xfrm>
-            <a:off x="5852160" y="3383279"/>
-            <a:ext cx="5559552" cy="457200"/>
+            <a:off x="5852160" y="3494493"/>
+            <a:ext cx="5559552" cy="659853"/>
           </a:xfrm>
           <a:prstGeom prst="rect">
             <a:avLst/>
@@ -8766,7 +8640,7 @@
         </p:nvSpPr>
         <p:spPr>
           <a:xfrm>
-            <a:off x="777240" y="3968496"/>
+            <a:off x="777240" y="4264075"/>
             <a:ext cx="10634472" cy="10058"/>
           </a:xfrm>
           <a:prstGeom prst="rect">
@@ -8796,8 +8670,8 @@
         </p:nvSpPr>
         <p:spPr>
           <a:xfrm>
-            <a:off x="777240" y="4187952"/>
-            <a:ext cx="4572000" cy="457200"/>
+            <a:off x="777240" y="4410379"/>
+            <a:ext cx="4572000" cy="416166"/>
           </a:xfrm>
           <a:prstGeom prst="rect">
             <a:avLst/>
@@ -8847,8 +8721,8 @@
         </p:nvSpPr>
         <p:spPr>
           <a:xfrm>
-            <a:off x="5852160" y="4206240"/>
-            <a:ext cx="5559552" cy="457200"/>
+            <a:off x="5852160" y="4428667"/>
+            <a:ext cx="5559552" cy="416166"/>
           </a:xfrm>
           <a:prstGeom prst="rect">
             <a:avLst/>
@@ -8889,7 +8763,7 @@
         </p:nvSpPr>
         <p:spPr>
           <a:xfrm>
-            <a:off x="777240" y="4791456"/>
+            <a:off x="777240" y="4954562"/>
             <a:ext cx="10634472" cy="10058"/>
           </a:xfrm>
           <a:prstGeom prst="rect">
@@ -8919,8 +8793,8 @@
         </p:nvSpPr>
         <p:spPr>
           <a:xfrm>
-            <a:off x="777240" y="5010912"/>
-            <a:ext cx="4572000" cy="457200"/>
+            <a:off x="777240" y="5100866"/>
+            <a:ext cx="4572000" cy="659853"/>
           </a:xfrm>
           <a:prstGeom prst="rect">
             <a:avLst/>
@@ -8970,8 +8844,8 @@
         </p:nvSpPr>
         <p:spPr>
           <a:xfrm>
-            <a:off x="5852160" y="5029200"/>
-            <a:ext cx="5559552" cy="457200"/>
+            <a:off x="5852160" y="5119154"/>
+            <a:ext cx="5559552" cy="659853"/>
           </a:xfrm>
           <a:prstGeom prst="rect">
             <a:avLst/>
@@ -9012,7 +8886,7 @@
         </p:nvSpPr>
         <p:spPr>
           <a:xfrm>
-            <a:off x="777240" y="5614416"/>
+            <a:off x="777240" y="5888736"/>
             <a:ext cx="10634472" cy="10058"/>
           </a:xfrm>
           <a:prstGeom prst="rect">
@@ -9331,7 +9205,7 @@
         <p:spPr>
           <a:xfrm>
             <a:off x="777240" y="1828800"/>
-            <a:ext cx="5074920" cy="1005840"/>
+            <a:ext cx="5074920" cy="1211465"/>
           </a:xfrm>
           <a:prstGeom prst="rect">
             <a:avLst/>
@@ -9400,7 +9274,7 @@
         </p:nvSpPr>
         <p:spPr>
           <a:xfrm>
-            <a:off x="777240" y="2871215"/>
+            <a:off x="777240" y="3168281"/>
             <a:ext cx="5074920" cy="10058"/>
           </a:xfrm>
           <a:prstGeom prst="rect">
@@ -9430,8 +9304,8 @@
         </p:nvSpPr>
         <p:spPr>
           <a:xfrm>
-            <a:off x="777240" y="3108960"/>
-            <a:ext cx="5074920" cy="1005840"/>
+            <a:off x="777240" y="3314585"/>
+            <a:ext cx="5074920" cy="1211465"/>
           </a:xfrm>
           <a:prstGeom prst="rect">
             <a:avLst/>
@@ -9500,7 +9374,7 @@
         </p:nvSpPr>
         <p:spPr>
           <a:xfrm>
-            <a:off x="777240" y="4151376"/>
+            <a:off x="777240" y="4654067"/>
             <a:ext cx="5074920" cy="10058"/>
           </a:xfrm>
           <a:prstGeom prst="rect">
@@ -9530,8 +9404,8 @@
         </p:nvSpPr>
         <p:spPr>
           <a:xfrm>
-            <a:off x="777240" y="4389120"/>
-            <a:ext cx="5074920" cy="1005840"/>
+            <a:off x="777240" y="4800371"/>
+            <a:ext cx="5074920" cy="960348"/>
           </a:xfrm>
           <a:prstGeom prst="rect">
             <a:avLst/>
@@ -9600,7 +9474,7 @@
         </p:nvSpPr>
         <p:spPr>
           <a:xfrm>
-            <a:off x="777240" y="5431536"/>
+            <a:off x="777240" y="5888736"/>
             <a:ext cx="5074920" cy="10058"/>
           </a:xfrm>
           <a:prstGeom prst="rect">
@@ -9631,7 +9505,7 @@
         <p:spPr>
           <a:xfrm>
             <a:off x="6089903" y="1517904"/>
-            <a:ext cx="10058" cy="4288536"/>
+            <a:ext cx="10058" cy="4517136"/>
           </a:xfrm>
           <a:prstGeom prst="rect">
             <a:avLst/>
@@ -9703,7 +9577,7 @@
         <p:spPr>
           <a:xfrm>
             <a:off x="6336792" y="1828800"/>
-            <a:ext cx="5074920" cy="1005840"/>
+            <a:ext cx="5074920" cy="1127759"/>
           </a:xfrm>
           <a:prstGeom prst="rect">
             <a:avLst/>
@@ -9763,7 +9637,7 @@
         </p:nvSpPr>
         <p:spPr>
           <a:xfrm>
-            <a:off x="6336792" y="2871215"/>
+            <a:off x="6336792" y="3084575"/>
             <a:ext cx="5074920" cy="10058"/>
           </a:xfrm>
           <a:prstGeom prst="rect">
@@ -9793,8 +9667,8 @@
         </p:nvSpPr>
         <p:spPr>
           <a:xfrm>
-            <a:off x="6336792" y="3108960"/>
-            <a:ext cx="5074920" cy="1005840"/>
+            <a:off x="6336792" y="3230880"/>
+            <a:ext cx="5074920" cy="1127759"/>
           </a:xfrm>
           <a:prstGeom prst="rect">
             <a:avLst/>
@@ -9854,7 +9728,7 @@
         </p:nvSpPr>
         <p:spPr>
           <a:xfrm>
-            <a:off x="6336792" y="4151376"/>
+            <a:off x="6336792" y="4486656"/>
             <a:ext cx="5074920" cy="10058"/>
           </a:xfrm>
           <a:prstGeom prst="rect">
@@ -9884,8 +9758,8 @@
         </p:nvSpPr>
         <p:spPr>
           <a:xfrm>
-            <a:off x="6336792" y="4389120"/>
-            <a:ext cx="5074920" cy="1005840"/>
+            <a:off x="6336792" y="4632960"/>
+            <a:ext cx="5074920" cy="1127759"/>
           </a:xfrm>
           <a:prstGeom prst="rect">
             <a:avLst/>
@@ -9945,7 +9819,7 @@
         </p:nvSpPr>
         <p:spPr>
           <a:xfrm>
-            <a:off x="6336792" y="5431536"/>
+            <a:off x="6336792" y="5888736"/>
             <a:ext cx="5074920" cy="10058"/>
           </a:xfrm>
           <a:prstGeom prst="rect">
